--- a/Group 2 Capstone EACO.pptx
+++ b/Group 2 Capstone EACO.pptx
@@ -124,6 +124,112 @@
     </p:ext>
   </p:extLst>
 </p:presentation>
+</file>
+
+<file path=ppt/changesInfos/changesInfo1.xml><?xml version="1.0" encoding="utf-8"?>
+<pc:chgInfo xmlns:a="http://schemas.openxmlformats.org/drawingml/2006/main" xmlns:r="http://schemas.openxmlformats.org/officeDocument/2006/relationships" xmlns:ac="http://schemas.microsoft.com/office/drawing/2013/main/command" xmlns:pc="http://schemas.microsoft.com/office/powerpoint/2013/main/command">
+  <pc:docChgLst>
+    <pc:chgData name="David Irungu" userId="3570a5346c53ff8c" providerId="LiveId" clId="{B3EF4350-6A02-4366-A4A5-47E00D9EF2BB}"/>
+    <pc:docChg chg="custSel modSld">
+      <pc:chgData name="David Irungu" userId="3570a5346c53ff8c" providerId="LiveId" clId="{B3EF4350-6A02-4366-A4A5-47E00D9EF2BB}" dt="2026-08-17T12:54:46.781" v="43" actId="478"/>
+      <pc:docMkLst>
+        <pc:docMk/>
+      </pc:docMkLst>
+      <pc:sldChg chg="delSp modSp mod">
+        <pc:chgData name="David Irungu" userId="3570a5346c53ff8c" providerId="LiveId" clId="{B3EF4350-6A02-4366-A4A5-47E00D9EF2BB}" dt="2026-08-17T12:54:43.259" v="42" actId="478"/>
+        <pc:sldMkLst>
+          <pc:docMk/>
+          <pc:sldMk cId="0" sldId="257"/>
+        </pc:sldMkLst>
+        <pc:spChg chg="del">
+          <ac:chgData name="David Irungu" userId="3570a5346c53ff8c" providerId="LiveId" clId="{B3EF4350-6A02-4366-A4A5-47E00D9EF2BB}" dt="2026-08-17T12:54:43.259" v="42" actId="478"/>
+          <ac:spMkLst>
+            <pc:docMk/>
+            <pc:sldMk cId="0" sldId="257"/>
+            <ac:spMk id="2" creationId="{00000000-0000-0000-0000-000000000000}"/>
+          </ac:spMkLst>
+        </pc:spChg>
+        <pc:spChg chg="mod">
+          <ac:chgData name="David Irungu" userId="3570a5346c53ff8c" providerId="LiveId" clId="{B3EF4350-6A02-4366-A4A5-47E00D9EF2BB}" dt="2026-08-17T12:54:39.913" v="41" actId="20577"/>
+          <ac:spMkLst>
+            <pc:docMk/>
+            <pc:sldMk cId="0" sldId="257"/>
+            <ac:spMk id="3" creationId="{00000000-0000-0000-0000-000000000000}"/>
+          </ac:spMkLst>
+        </pc:spChg>
+      </pc:sldChg>
+      <pc:sldChg chg="delSp modSp mod">
+        <pc:chgData name="David Irungu" userId="3570a5346c53ff8c" providerId="LiveId" clId="{B3EF4350-6A02-4366-A4A5-47E00D9EF2BB}" dt="2026-08-17T12:54:46.781" v="43" actId="478"/>
+        <pc:sldMkLst>
+          <pc:docMk/>
+          <pc:sldMk cId="0" sldId="258"/>
+        </pc:sldMkLst>
+        <pc:spChg chg="del">
+          <ac:chgData name="David Irungu" userId="3570a5346c53ff8c" providerId="LiveId" clId="{B3EF4350-6A02-4366-A4A5-47E00D9EF2BB}" dt="2026-08-17T12:54:46.781" v="43" actId="478"/>
+          <ac:spMkLst>
+            <pc:docMk/>
+            <pc:sldMk cId="0" sldId="258"/>
+            <ac:spMk id="2" creationId="{00000000-0000-0000-0000-000000000000}"/>
+          </ac:spMkLst>
+        </pc:spChg>
+        <pc:spChg chg="mod">
+          <ac:chgData name="David Irungu" userId="3570a5346c53ff8c" providerId="LiveId" clId="{B3EF4350-6A02-4366-A4A5-47E00D9EF2BB}" dt="2026-08-17T12:54:29.573" v="27" actId="20577"/>
+          <ac:spMkLst>
+            <pc:docMk/>
+            <pc:sldMk cId="0" sldId="258"/>
+            <ac:spMk id="3" creationId="{00000000-0000-0000-0000-000000000000}"/>
+          </ac:spMkLst>
+        </pc:spChg>
+      </pc:sldChg>
+      <pc:sldChg chg="modSp mod">
+        <pc:chgData name="David Irungu" userId="3570a5346c53ff8c" providerId="LiveId" clId="{B3EF4350-6A02-4366-A4A5-47E00D9EF2BB}" dt="2026-08-17T12:52:30.311" v="7" actId="20577"/>
+        <pc:sldMkLst>
+          <pc:docMk/>
+          <pc:sldMk cId="0" sldId="269"/>
+        </pc:sldMkLst>
+        <pc:spChg chg="mod">
+          <ac:chgData name="David Irungu" userId="3570a5346c53ff8c" providerId="LiveId" clId="{B3EF4350-6A02-4366-A4A5-47E00D9EF2BB}" dt="2026-08-17T12:51:29.386" v="3" actId="20577"/>
+          <ac:spMkLst>
+            <pc:docMk/>
+            <pc:sldMk cId="0" sldId="269"/>
+            <ac:spMk id="6" creationId="{00000000-0000-0000-0000-000000000000}"/>
+          </ac:spMkLst>
+        </pc:spChg>
+        <pc:spChg chg="mod">
+          <ac:chgData name="David Irungu" userId="3570a5346c53ff8c" providerId="LiveId" clId="{B3EF4350-6A02-4366-A4A5-47E00D9EF2BB}" dt="2026-08-17T12:52:30.311" v="7" actId="20577"/>
+          <ac:spMkLst>
+            <pc:docMk/>
+            <pc:sldMk cId="0" sldId="269"/>
+            <ac:spMk id="8" creationId="{00000000-0000-0000-0000-000000000000}"/>
+          </ac:spMkLst>
+        </pc:spChg>
+      </pc:sldChg>
+      <pc:sldChg chg="delSp modSp mod">
+        <pc:chgData name="David Irungu" userId="3570a5346c53ff8c" providerId="LiveId" clId="{B3EF4350-6A02-4366-A4A5-47E00D9EF2BB}" dt="2026-08-17T12:53:17.948" v="9" actId="478"/>
+        <pc:sldMkLst>
+          <pc:docMk/>
+          <pc:sldMk cId="0" sldId="270"/>
+        </pc:sldMkLst>
+        <pc:spChg chg="del">
+          <ac:chgData name="David Irungu" userId="3570a5346c53ff8c" providerId="LiveId" clId="{B3EF4350-6A02-4366-A4A5-47E00D9EF2BB}" dt="2026-08-17T12:53:17.948" v="9" actId="478"/>
+          <ac:spMkLst>
+            <pc:docMk/>
+            <pc:sldMk cId="0" sldId="270"/>
+            <ac:spMk id="2" creationId="{00000000-0000-0000-0000-000000000000}"/>
+          </ac:spMkLst>
+        </pc:spChg>
+        <pc:spChg chg="mod">
+          <ac:chgData name="David Irungu" userId="3570a5346c53ff8c" providerId="LiveId" clId="{B3EF4350-6A02-4366-A4A5-47E00D9EF2BB}" dt="2026-08-17T12:53:15.066" v="8"/>
+          <ac:spMkLst>
+            <pc:docMk/>
+            <pc:sldMk cId="0" sldId="270"/>
+            <ac:spMk id="3" creationId="{00000000-0000-0000-0000-000000000000}"/>
+          </ac:spMkLst>
+        </pc:spChg>
+      </pc:sldChg>
+    </pc:docChg>
+  </pc:docChgLst>
+</pc:chgInfo>
 </file>
 
 <file path=ppt/notesMasters/notesMaster1.xml><?xml version="1.0" encoding="utf-8"?>
@@ -6480,7 +6586,7 @@
                 <a:ea typeface="Calibri" pitchFamily="34" charset="-122"/>
                 <a:cs typeface="Calibri" pitchFamily="34" charset="-120"/>
               </a:rPr>
-              <a:t>Pooled-panel correlation between electricity access and internet use is r = 0.744 (p &lt; 0.001, n = 110); the OLS regression confirms electricity remains a significant predictor after controlling for mobile subscriptions. EACO should advocate joint energy–connectivity planning: fibre along grid extensions, solar-powered base stations off-grid.</a:t>
+              <a:t>High correlation between electricity access and internet use is r = 0.744 (p &lt; 0.001, n = 110); the OLS regression confirms electricity remains a significant predictor after controlling for mobile subscriptions. EACO should advocate joint energy–connectivity planning: fibre along grid extensions, solar-powered base stations off-grid.</a:t>
             </a:r>
             <a:endParaRPr lang="en-US" sz="1150" dirty="0"/>
           </a:p>
@@ -6558,7 +6664,7 @@
                 <a:ea typeface="Cambria" pitchFamily="34" charset="-122"/>
                 <a:cs typeface="Cambria" pitchFamily="34" charset="-120"/>
               </a:rPr>
-              <a:t>Convert connectivity into usage, tackle affordability &amp; devices</a:t>
+              <a:t>Review sector-specific taxes on data and devices</a:t>
             </a:r>
             <a:endParaRPr lang="en-US" sz="1650" dirty="0"/>
           </a:p>
@@ -6839,45 +6945,6 @@
       </p:grpSpPr>
       <p:sp>
         <p:nvSpPr>
-          <p:cNvPr id="2" name="Text 0"/>
-          <p:cNvSpPr/>
-          <p:nvPr/>
-        </p:nvSpPr>
-        <p:spPr>
-          <a:xfrm>
-            <a:off x="457200" y="320040"/>
-            <a:ext cx="11247120" cy="274320"/>
-          </a:xfrm>
-          <a:prstGeom prst="rect">
-            <a:avLst/>
-          </a:prstGeom>
-          <a:noFill/>
-          <a:ln/>
-        </p:spPr>
-        <p:txBody>
-          <a:bodyPr wrap="square" rtlCol="0" anchor="ctr"/>
-          <a:lstStyle/>
-          <a:p>
-            <a:pPr marL="0" indent="0">
-              <a:buNone/>
-            </a:pPr>
-            <a:r>
-              <a:rPr lang="en-US" sz="1200" b="1" kern="0" spc="100" dirty="0">
-                <a:solidFill>
-                  <a:srgbClr val="1C7293"/>
-                </a:solidFill>
-                <a:latin typeface="Calibri" pitchFamily="34" charset="0"/>
-                <a:ea typeface="Calibri" pitchFamily="34" charset="-122"/>
-                <a:cs typeface="Calibri" pitchFamily="34" charset="-120"/>
-              </a:rPr>
-              <a:t>EXECUTIVE SUMMARY</a:t>
-            </a:r>
-            <a:endParaRPr lang="en-US" sz="1200" dirty="0"/>
-          </a:p>
-        </p:txBody>
-      </p:sp>
-      <p:sp>
-        <p:nvSpPr>
           <p:cNvPr id="3" name="Text 1"/>
           <p:cNvSpPr/>
           <p:nvPr/>
@@ -6909,9 +6976,8 @@
                 <a:ea typeface="Cambria" pitchFamily="34" charset="-122"/>
                 <a:cs typeface="Cambria" pitchFamily="34" charset="-120"/>
               </a:rPr>
-              <a:t>Findings &amp; Practical Recommendations for EACO</a:t>
-            </a:r>
-            <a:endParaRPr lang="en-US" sz="3000" dirty="0"/>
+              <a:t>EXECUTIVE SUMMARY</a:t>
+            </a:r>
           </a:p>
         </p:txBody>
       </p:sp>
@@ -7676,45 +7742,6 @@
       </p:grpSpPr>
       <p:sp>
         <p:nvSpPr>
-          <p:cNvPr id="2" name="Text 0"/>
-          <p:cNvSpPr/>
-          <p:nvPr/>
-        </p:nvSpPr>
-        <p:spPr>
-          <a:xfrm>
-            <a:off x="457200" y="320040"/>
-            <a:ext cx="11247120" cy="274320"/>
-          </a:xfrm>
-          <a:prstGeom prst="rect">
-            <a:avLst/>
-          </a:prstGeom>
-          <a:noFill/>
-          <a:ln/>
-        </p:spPr>
-        <p:txBody>
-          <a:bodyPr wrap="square" rtlCol="0" anchor="ctr"/>
-          <a:lstStyle/>
-          <a:p>
-            <a:pPr marL="0" indent="0">
-              <a:buNone/>
-            </a:pPr>
-            <a:r>
-              <a:rPr lang="en-US" sz="1200" b="1" kern="0" spc="100" dirty="0">
-                <a:solidFill>
-                  <a:srgbClr val="1C7293"/>
-                </a:solidFill>
-                <a:latin typeface="Calibri" pitchFamily="34" charset="0"/>
-                <a:ea typeface="Calibri" pitchFamily="34" charset="-122"/>
-                <a:cs typeface="Calibri" pitchFamily="34" charset="-120"/>
-              </a:rPr>
-              <a:t>CONTEXT</a:t>
-            </a:r>
-            <a:endParaRPr lang="en-US" sz="1200" dirty="0"/>
-          </a:p>
-        </p:txBody>
-      </p:sp>
-      <p:sp>
-        <p:nvSpPr>
           <p:cNvPr id="3" name="Text 1"/>
           <p:cNvSpPr/>
           <p:nvPr/>
@@ -7745,7 +7772,7 @@
                 <a:latin typeface="Cambria" pitchFamily="34" charset="0"/>
                 <a:ea typeface="Cambria" pitchFamily="34" charset="-122"/>
               </a:rPr>
-              <a:t>The Problem</a:t>
+              <a:t>Problem Definition</a:t>
             </a:r>
             <a:endParaRPr lang="en-US" sz="3000" dirty="0"/>
           </a:p>
@@ -8757,45 +8784,6 @@
       </p:grpSpPr>
       <p:sp>
         <p:nvSpPr>
-          <p:cNvPr id="2" name="Text 0"/>
-          <p:cNvSpPr/>
-          <p:nvPr/>
-        </p:nvSpPr>
-        <p:spPr>
-          <a:xfrm>
-            <a:off x="457200" y="320040"/>
-            <a:ext cx="11247120" cy="274320"/>
-          </a:xfrm>
-          <a:prstGeom prst="rect">
-            <a:avLst/>
-          </a:prstGeom>
-          <a:noFill/>
-          <a:ln/>
-        </p:spPr>
-        <p:txBody>
-          <a:bodyPr wrap="square" rtlCol="0" anchor="ctr"/>
-          <a:lstStyle/>
-          <a:p>
-            <a:pPr marL="0" indent="0">
-              <a:buNone/>
-            </a:pPr>
-            <a:r>
-              <a:rPr lang="en-US" sz="1200" b="1" kern="0" spc="100" dirty="0">
-                <a:solidFill>
-                  <a:srgbClr val="1C7293"/>
-                </a:solidFill>
-                <a:latin typeface="Calibri" pitchFamily="34" charset="0"/>
-                <a:ea typeface="Calibri" pitchFamily="34" charset="-122"/>
-                <a:cs typeface="Calibri" pitchFamily="34" charset="-120"/>
-              </a:rPr>
-              <a:t>SCOPE</a:t>
-            </a:r>
-            <a:endParaRPr lang="en-US" sz="1200" dirty="0"/>
-          </a:p>
-        </p:txBody>
-      </p:sp>
-      <p:sp>
-        <p:nvSpPr>
           <p:cNvPr id="3" name="Text 1"/>
           <p:cNvSpPr/>
           <p:nvPr/>
@@ -8827,7 +8815,7 @@
                 <a:ea typeface="Cambria" pitchFamily="34" charset="-122"/>
                 <a:cs typeface="Cambria" pitchFamily="34" charset="-120"/>
               </a:rPr>
-              <a:t>Six Questions Guiding This Analysis</a:t>
+              <a:t>Research Questions</a:t>
             </a:r>
             <a:endParaRPr lang="en-US" sz="3000" dirty="0"/>
           </a:p>
